--- a/weekly_report_template/out/example.pptx
+++ b/weekly_report_template/out/example.pptx
@@ -657,10 +657,10 @@
           <a:gradFill rotWithShape="1">
             <a:gsLst>
               <a:gs pos="0">
-                <a:srgbClr val="0B1F3F"/>
+                <a:srgbClr val="273470"/>
               </a:gs>
               <a:gs pos="100000">
-                <a:srgbClr val="14315E"/>
+                <a:srgbClr val="1B2452"/>
               </a:gs>
             </a:gsLst>
             <a:lin ang="1200000" scaled="0"/>
@@ -686,8 +686,8 @@
           </a:prstGeom>
           <a:ln w="6350" cap="rnd">
             <a:solidFill>
-              <a:srgbClr val="12A5A8">
-                <a:alpha val="35000"/>
+              <a:srgbClr val="66CCFF">
+                <a:alpha val="38000"/>
               </a:srgbClr>
             </a:solidFill>
             <a:round/>
@@ -710,8 +710,8 @@
           </a:prstGeom>
           <a:ln w="6350" cap="rnd">
             <a:solidFill>
-              <a:srgbClr val="12A5A8">
-                <a:alpha val="35000"/>
+              <a:srgbClr val="66CCFF">
+                <a:alpha val="38000"/>
               </a:srgbClr>
             </a:solidFill>
             <a:round/>
@@ -734,8 +734,8 @@
           </a:prstGeom>
           <a:ln w="6350" cap="rnd">
             <a:solidFill>
-              <a:srgbClr val="12A5A8">
-                <a:alpha val="35000"/>
+              <a:srgbClr val="66CCFF">
+                <a:alpha val="38000"/>
               </a:srgbClr>
             </a:solidFill>
             <a:round/>
@@ -758,8 +758,8 @@
           </a:prstGeom>
           <a:ln w="6350" cap="rnd">
             <a:solidFill>
-              <a:srgbClr val="12A5A8">
-                <a:alpha val="35000"/>
+              <a:srgbClr val="66CCFF">
+                <a:alpha val="38000"/>
               </a:srgbClr>
             </a:solidFill>
             <a:round/>
@@ -782,8 +782,8 @@
           </a:prstGeom>
           <a:ln w="6350" cap="rnd">
             <a:solidFill>
-              <a:srgbClr val="12A5A8">
-                <a:alpha val="35000"/>
+              <a:srgbClr val="66CCFF">
+                <a:alpha val="38000"/>
               </a:srgbClr>
             </a:solidFill>
             <a:round/>
@@ -806,8 +806,8 @@
           </a:prstGeom>
           <a:ln w="6350" cap="rnd">
             <a:solidFill>
-              <a:srgbClr val="12A5A8">
-                <a:alpha val="35000"/>
+              <a:srgbClr val="66CCFF">
+                <a:alpha val="38000"/>
               </a:srgbClr>
             </a:solidFill>
             <a:round/>
@@ -830,8 +830,8 @@
           </a:prstGeom>
           <a:ln w="6350" cap="rnd">
             <a:solidFill>
-              <a:srgbClr val="12A5A8">
-                <a:alpha val="35000"/>
+              <a:srgbClr val="66CCFF">
+                <a:alpha val="38000"/>
               </a:srgbClr>
             </a:solidFill>
             <a:round/>
@@ -854,8 +854,8 @@
           </a:prstGeom>
           <a:ln w="6350" cap="rnd">
             <a:solidFill>
-              <a:srgbClr val="12A5A8">
-                <a:alpha val="35000"/>
+              <a:srgbClr val="66CCFF">
+                <a:alpha val="38000"/>
               </a:srgbClr>
             </a:solidFill>
             <a:round/>
@@ -877,8 +877,8 @@
             <a:avLst/>
           </a:prstGeom>
           <a:solidFill>
-            <a:srgbClr val="12A5A8">
-              <a:alpha val="60000"/>
+            <a:srgbClr val="66CCFF">
+              <a:alpha val="65000"/>
             </a:srgbClr>
           </a:solidFill>
           <a:ln>
@@ -901,8 +901,8 @@
             <a:avLst/>
           </a:prstGeom>
           <a:solidFill>
-            <a:srgbClr val="12A5A8">
-              <a:alpha val="60000"/>
+            <a:srgbClr val="66CCFF">
+              <a:alpha val="65000"/>
             </a:srgbClr>
           </a:solidFill>
           <a:ln>
@@ -925,8 +925,8 @@
             <a:avLst/>
           </a:prstGeom>
           <a:solidFill>
-            <a:srgbClr val="12A5A8">
-              <a:alpha val="60000"/>
+            <a:srgbClr val="66CCFF">
+              <a:alpha val="65000"/>
             </a:srgbClr>
           </a:solidFill>
           <a:ln>
@@ -949,8 +949,8 @@
             <a:avLst/>
           </a:prstGeom>
           <a:solidFill>
-            <a:srgbClr val="12A5A8">
-              <a:alpha val="60000"/>
+            <a:srgbClr val="66CCFF">
+              <a:alpha val="65000"/>
             </a:srgbClr>
           </a:solidFill>
           <a:ln>
@@ -973,8 +973,8 @@
             <a:avLst/>
           </a:prstGeom>
           <a:solidFill>
-            <a:srgbClr val="12A5A8">
-              <a:alpha val="60000"/>
+            <a:srgbClr val="66CCFF">
+              <a:alpha val="65000"/>
             </a:srgbClr>
           </a:solidFill>
           <a:ln>
@@ -997,8 +997,8 @@
             <a:avLst/>
           </a:prstGeom>
           <a:solidFill>
-            <a:srgbClr val="12A5A8">
-              <a:alpha val="60000"/>
+            <a:srgbClr val="66CCFF">
+              <a:alpha val="65000"/>
             </a:srgbClr>
           </a:solidFill>
           <a:ln>
@@ -1021,8 +1021,8 @@
             <a:avLst/>
           </a:prstGeom>
           <a:solidFill>
-            <a:srgbClr val="12A5A8">
-              <a:alpha val="60000"/>
+            <a:srgbClr val="66CCFF">
+              <a:alpha val="65000"/>
             </a:srgbClr>
           </a:solidFill>
           <a:ln>
@@ -1045,8 +1045,8 @@
             <a:avLst/>
           </a:prstGeom>
           <a:solidFill>
-            <a:srgbClr val="12A5A8">
-              <a:alpha val="60000"/>
+            <a:srgbClr val="66CCFF">
+              <a:alpha val="65000"/>
             </a:srgbClr>
           </a:solidFill>
           <a:ln>
@@ -1069,8 +1069,8 @@
             <a:avLst/>
           </a:prstGeom>
           <a:solidFill>
-            <a:srgbClr val="12A5A8">
-              <a:alpha val="60000"/>
+            <a:srgbClr val="66CCFF">
+              <a:alpha val="65000"/>
             </a:srgbClr>
           </a:solidFill>
           <a:ln>
@@ -1233,10 +1233,10 @@
           <a:gradFill rotWithShape="1">
             <a:gsLst>
               <a:gs pos="0">
-                <a:srgbClr val="12A5A8"/>
+                <a:srgbClr val="33CC99"/>
               </a:gs>
               <a:gs pos="100000">
-                <a:srgbClr val="6CC04A"/>
+                <a:srgbClr val="99D633"/>
               </a:gs>
             </a:gsLst>
             <a:lin ang="0" scaled="0"/>
@@ -1253,11 +1253,9 @@
               <a:buNone/>
             </a:pPr>
             <a:r>
-              <a:rPr lang="ar-SA" sz="950" dirty="0">
+              <a:rPr lang="ar-SA" sz="950" b="1" dirty="0">
                 <a:solidFill>
-                  <a:srgbClr val="FFFFFF">
-                    <a:alpha val="88000"/>
-                  </a:srgbClr>
+                  <a:srgbClr val="273470"/>
                 </a:solidFill>
                 <a:latin typeface="IBM Plex Sans Arabic"/>
                 <a:cs typeface="IBM Plex Sans Arabic"/>
@@ -1267,7 +1265,7 @@
             <a:fld id="{B6F15528-21DE-4FAA-801E-634DDDAF4B2B}" type="slidenum">
               <a:rPr lang="en-US" sz="2200" b="1" dirty="0">
                 <a:solidFill>
-                  <a:srgbClr val="FFFFFF"/>
+                  <a:srgbClr val="273470"/>
                 </a:solidFill>
                 <a:latin typeface="IBM Plex Sans Arabic"/>
                 <a:cs typeface="IBM Plex Sans Arabic"/>
@@ -1285,8 +1283,8 @@
         </p:nvSpPr>
         <p:spPr>
           <a:xfrm>
-            <a:off x="4992000" y="1098000"/>
-            <a:ext cx="2136000" cy="144000"/>
+            <a:off x="4992000" y="1080000"/>
+            <a:ext cx="2136000" cy="162000"/>
           </a:xfrm>
           <a:prstGeom prst="rect">
             <a:avLst/>
@@ -1304,9 +1302,9 @@
               <a:buNone/>
             </a:pPr>
             <a:r>
-              <a:rPr lang="ar-SA" sz="750" b="1" dirty="0">
+              <a:rPr lang="ar-SA" sz="850" b="1" dirty="0">
                 <a:solidFill>
-                  <a:srgbClr val="12A5A8"/>
+                  <a:srgbClr val="33CC99"/>
                 </a:solidFill>
                 <a:latin typeface="IBM Plex Sans Arabic"/>
                 <a:cs typeface="IBM Plex Sans Arabic"/>
@@ -1374,8 +1372,8 @@
         </p:nvSpPr>
         <p:spPr>
           <a:xfrm>
-            <a:off x="2712000" y="1098000"/>
-            <a:ext cx="2136000" cy="144000"/>
+            <a:off x="2712000" y="1080000"/>
+            <a:ext cx="2136000" cy="162000"/>
           </a:xfrm>
           <a:prstGeom prst="rect">
             <a:avLst/>
@@ -1393,9 +1391,9 @@
               <a:buNone/>
             </a:pPr>
             <a:r>
-              <a:rPr lang="ar-SA" sz="750" b="1" dirty="0">
+              <a:rPr lang="ar-SA" sz="850" b="1" dirty="0">
                 <a:solidFill>
-                  <a:srgbClr val="12A5A8"/>
+                  <a:srgbClr val="33CC99"/>
                 </a:solidFill>
                 <a:latin typeface="IBM Plex Sans Arabic"/>
                 <a:cs typeface="IBM Plex Sans Arabic"/>
@@ -1463,8 +1461,8 @@
         </p:nvSpPr>
         <p:spPr>
           <a:xfrm>
-            <a:off x="432000" y="1098000"/>
-            <a:ext cx="2136000" cy="144000"/>
+            <a:off x="432000" y="1080000"/>
+            <a:ext cx="2136000" cy="162000"/>
           </a:xfrm>
           <a:prstGeom prst="rect">
             <a:avLst/>
@@ -1482,9 +1480,9 @@
               <a:buNone/>
             </a:pPr>
             <a:r>
-              <a:rPr lang="ar-SA" sz="750" b="1" dirty="0">
+              <a:rPr lang="ar-SA" sz="850" b="1" dirty="0">
                 <a:solidFill>
-                  <a:srgbClr val="12A5A8"/>
+                  <a:srgbClr val="33CC99"/>
                 </a:solidFill>
                 <a:latin typeface="IBM Plex Sans Arabic"/>
                 <a:cs typeface="IBM Plex Sans Arabic"/>
@@ -1573,7 +1571,7 @@
             <a:r>
               <a:rPr lang="ar-SA" sz="900" b="1" dirty="0">
                 <a:solidFill>
-                  <a:srgbClr val="0E7C86"/>
+                  <a:srgbClr val="0E8A8A"/>
                 </a:solidFill>
                 <a:latin typeface="IBM Plex Sans Arabic"/>
                 <a:cs typeface="IBM Plex Sans Arabic"/>
@@ -1618,7 +1616,7 @@
               <a:buNone/>
               <a:defRPr lang="ar-SA" sz="1250" dirty="0">
                 <a:solidFill>
-                  <a:srgbClr val="1C2B3A"/>
+                  <a:srgbClr val="1F2A37"/>
                 </a:solidFill>
                 <a:latin typeface="IBM Plex Sans Arabic"/>
                 <a:cs typeface="IBM Plex Sans Arabic"/>
@@ -1650,7 +1648,7 @@
             </a:avLst>
           </a:prstGeom>
           <a:solidFill>
-            <a:srgbClr val="EEF2F8"/>
+            <a:srgbClr val="EEF0F8"/>
           </a:solidFill>
           <a:ln>
             <a:noFill/>
@@ -1690,7 +1688,7 @@
               <a:buNone/>
               <a:defRPr lang="ar-SA" sz="2200" b="1" dirty="0">
                 <a:solidFill>
-                  <a:srgbClr val="6CC04A"/>
+                  <a:srgbClr val="178F6B"/>
                 </a:solidFill>
                 <a:latin typeface="IBM Plex Sans Arabic"/>
                 <a:cs typeface="IBM Plex Sans Arabic"/>
@@ -1735,7 +1733,7 @@
               <a:buNone/>
             </a:pPr>
             <a:r>
-              <a:rPr lang="ar-SA" sz="800" dirty="0">
+              <a:rPr lang="ar-SA" sz="850" dirty="0">
                 <a:solidFill>
                   <a:srgbClr val="5F6B7A"/>
                 </a:solidFill>
@@ -1764,7 +1762,7 @@
             </a:avLst>
           </a:prstGeom>
           <a:solidFill>
-            <a:srgbClr val="EEF2F8"/>
+            <a:srgbClr val="EEF0F8"/>
           </a:solidFill>
           <a:ln>
             <a:noFill/>
@@ -1804,7 +1802,7 @@
               <a:buNone/>
               <a:defRPr lang="ar-SA" sz="2200" b="1" dirty="0">
                 <a:solidFill>
-                  <a:srgbClr val="12A5A8"/>
+                  <a:srgbClr val="0E8A8A"/>
                 </a:solidFill>
                 <a:latin typeface="IBM Plex Sans Arabic"/>
                 <a:cs typeface="IBM Plex Sans Arabic"/>
@@ -1849,7 +1847,7 @@
               <a:buNone/>
             </a:pPr>
             <a:r>
-              <a:rPr lang="ar-SA" sz="800" dirty="0">
+              <a:rPr lang="ar-SA" sz="850" dirty="0">
                 <a:solidFill>
                   <a:srgbClr val="5F6B7A"/>
                 </a:solidFill>
@@ -1878,7 +1876,7 @@
             </a:avLst>
           </a:prstGeom>
           <a:solidFill>
-            <a:srgbClr val="EEF2F8"/>
+            <a:srgbClr val="EEF0F8"/>
           </a:solidFill>
           <a:ln>
             <a:noFill/>
@@ -1918,7 +1916,7 @@
               <a:buNone/>
               <a:defRPr lang="ar-SA" sz="2200" b="1" dirty="0">
                 <a:solidFill>
-                  <a:srgbClr val="0B1F3F"/>
+                  <a:srgbClr val="6459A7"/>
                 </a:solidFill>
                 <a:latin typeface="IBM Plex Sans Arabic"/>
                 <a:cs typeface="IBM Plex Sans Arabic"/>
@@ -1963,7 +1961,7 @@
               <a:buNone/>
             </a:pPr>
             <a:r>
-              <a:rPr lang="ar-SA" sz="800" dirty="0">
+              <a:rPr lang="ar-SA" sz="850" dirty="0">
                 <a:solidFill>
                   <a:srgbClr val="5F6B7A"/>
                 </a:solidFill>
@@ -1990,7 +1988,7 @@
             <a:avLst/>
           </a:prstGeom>
           <a:solidFill>
-            <a:srgbClr val="6CC04A"/>
+            <a:srgbClr val="33CC99"/>
           </a:solidFill>
           <a:ln>
             <a:noFill/>
@@ -2048,7 +2046,7 @@
             <a:r>
               <a:rPr lang="ar-SA" sz="1250" b="1" dirty="0">
                 <a:solidFill>
-                  <a:srgbClr val="0B1F3F"/>
+                  <a:srgbClr val="273470"/>
                 </a:solidFill>
                 <a:latin typeface="IBM Plex Sans Arabic"/>
                 <a:cs typeface="IBM Plex Sans Arabic"/>
@@ -2071,7 +2069,7 @@
         <p:spPr>
           <a:xfrm>
             <a:off x="432000" y="3564000"/>
-            <a:ext cx="6696000" cy="1512000"/>
+            <a:ext cx="6696000" cy="1440000"/>
           </a:xfrm>
           <a:prstGeom prst="rect">
             <a:avLst/>
@@ -2091,17 +2089,17 @@
                 <a:spcPts val="250"/>
               </a:spcAft>
               <a:buClr>
-                <a:srgbClr val="6CC04A"/>
+                <a:srgbClr val="33CC99"/>
               </a:buClr>
               <a:buSzPct val="110000"/>
               <a:buFont typeface="Arial" pitchFamily="34" charset="0"/>
               <a:buChar char="•"/>
               <a:defRPr lang="ar-SA" sz="1200" dirty="0">
                 <a:solidFill>
-                  <a:srgbClr val="1C2B3A"/>
+                  <a:srgbClr val="1F2A37"/>
                 </a:solidFill>
-                <a:latin typeface="IBM Plex Sans Arabic"/>
-                <a:cs typeface="IBM Plex Sans Arabic"/>
+                <a:latin typeface="IBM Plex Sans Arabic Medium"/>
+                <a:cs typeface="IBM Plex Sans Arabic Medium"/>
               </a:defRPr>
             </a:lvl1pPr>
             <a:lvl2pPr marL="342000" indent="-162000" algn="r" rtl="1">
@@ -2121,8 +2119,8 @@
                 <a:solidFill>
                   <a:srgbClr val="5F6B7A"/>
                 </a:solidFill>
-                <a:latin typeface="IBM Plex Sans Arabic"/>
-                <a:cs typeface="IBM Plex Sans Arabic"/>
+                <a:latin typeface="IBM Plex Sans Arabic Medium"/>
+                <a:cs typeface="IBM Plex Sans Arabic Medium"/>
               </a:defRPr>
             </a:lvl2pPr>
           </a:lstStyle>
@@ -2142,14 +2140,14 @@
         </p:nvSpPr>
         <p:spPr>
           <a:xfrm>
-            <a:off x="6998400" y="5302800"/>
+            <a:off x="6998400" y="5266800"/>
             <a:ext cx="129600" cy="129600"/>
           </a:xfrm>
           <a:prstGeom prst="ellipse">
             <a:avLst/>
           </a:prstGeom>
           <a:solidFill>
-            <a:srgbClr val="12A5A8"/>
+            <a:srgbClr val="0E8A8A"/>
           </a:solidFill>
           <a:ln>
             <a:noFill/>
@@ -2164,7 +2162,7 @@
         </p:nvSpPr>
         <p:spPr>
           <a:xfrm>
-            <a:off x="7038000" y="5342400"/>
+            <a:off x="7038000" y="5306400"/>
             <a:ext cx="50400" cy="50400"/>
           </a:xfrm>
           <a:prstGeom prst="ellipse">
@@ -2186,7 +2184,7 @@
         </p:nvSpPr>
         <p:spPr>
           <a:xfrm>
-            <a:off x="2606400" y="5248800"/>
+            <a:off x="2606400" y="5212800"/>
             <a:ext cx="4320000" cy="230400"/>
           </a:xfrm>
           <a:prstGeom prst="rect">
@@ -2207,7 +2205,7 @@
             <a:r>
               <a:rPr lang="ar-SA" sz="1250" b="1" dirty="0">
                 <a:solidFill>
-                  <a:srgbClr val="0B1F3F"/>
+                  <a:srgbClr val="273470"/>
                 </a:solidFill>
                 <a:latin typeface="IBM Plex Sans Arabic"/>
                 <a:cs typeface="IBM Plex Sans Arabic"/>
@@ -2225,14 +2223,14 @@
         </p:nvSpPr>
         <p:spPr>
           <a:xfrm>
-            <a:off x="6998400" y="7228800"/>
+            <a:off x="6998400" y="7246800"/>
             <a:ext cx="129600" cy="129600"/>
           </a:xfrm>
           <a:prstGeom prst="ellipse">
             <a:avLst/>
           </a:prstGeom>
           <a:solidFill>
-            <a:srgbClr val="0B1F3F"/>
+            <a:srgbClr val="6459A7"/>
           </a:solidFill>
           <a:ln>
             <a:noFill/>
@@ -2247,7 +2245,7 @@
         </p:nvSpPr>
         <p:spPr>
           <a:xfrm>
-            <a:off x="7038000" y="7268400"/>
+            <a:off x="7038000" y="7286400"/>
             <a:ext cx="50400" cy="50400"/>
           </a:xfrm>
           <a:prstGeom prst="ellipse">
@@ -2269,7 +2267,7 @@
         </p:nvSpPr>
         <p:spPr>
           <a:xfrm>
-            <a:off x="2606400" y="7174800"/>
+            <a:off x="2606400" y="7192800"/>
             <a:ext cx="4320000" cy="230400"/>
           </a:xfrm>
           <a:prstGeom prst="rect">
@@ -2290,7 +2288,7 @@
             <a:r>
               <a:rPr lang="ar-SA" sz="1250" b="1" dirty="0">
                 <a:solidFill>
-                  <a:srgbClr val="0B1F3F"/>
+                  <a:srgbClr val="273470"/>
                 </a:solidFill>
                 <a:latin typeface="IBM Plex Sans Arabic"/>
                 <a:cs typeface="IBM Plex Sans Arabic"/>
@@ -2312,8 +2310,8 @@
         </p:nvSpPr>
         <p:spPr>
           <a:xfrm>
-            <a:off x="432000" y="7452000"/>
-            <a:ext cx="6696000" cy="1188000"/>
+            <a:off x="432000" y="7470000"/>
+            <a:ext cx="6696000" cy="1170000"/>
           </a:xfrm>
           <a:prstGeom prst="rect">
             <a:avLst/>
@@ -2333,17 +2331,17 @@
                 <a:spcPts val="250"/>
               </a:spcAft>
               <a:buClr>
-                <a:srgbClr val="0B1F3F"/>
+                <a:srgbClr val="6459A7"/>
               </a:buClr>
               <a:buSzPct val="110000"/>
               <a:buFont typeface="Arial" pitchFamily="34" charset="0"/>
               <a:buChar char="•"/>
               <a:defRPr lang="ar-SA" sz="1200" dirty="0">
                 <a:solidFill>
-                  <a:srgbClr val="1C2B3A"/>
+                  <a:srgbClr val="1F2A37"/>
                 </a:solidFill>
-                <a:latin typeface="IBM Plex Sans Arabic"/>
-                <a:cs typeface="IBM Plex Sans Arabic"/>
+                <a:latin typeface="IBM Plex Sans Arabic Medium"/>
+                <a:cs typeface="IBM Plex Sans Arabic Medium"/>
               </a:defRPr>
             </a:lvl1pPr>
             <a:lvl2pPr marL="342000" indent="-162000" algn="r" rtl="1">
@@ -2363,8 +2361,8 @@
                 <a:solidFill>
                   <a:srgbClr val="5F6B7A"/>
                 </a:solidFill>
-                <a:latin typeface="IBM Plex Sans Arabic"/>
-                <a:cs typeface="IBM Plex Sans Arabic"/>
+                <a:latin typeface="IBM Plex Sans Arabic Medium"/>
+                <a:cs typeface="IBM Plex Sans Arabic Medium"/>
               </a:defRPr>
             </a:lvl2pPr>
           </a:lstStyle>
@@ -2393,7 +2391,7 @@
             </a:avLst>
           </a:prstGeom>
           <a:solidFill>
-            <a:srgbClr val="E6F5F5"/>
+            <a:srgbClr val="E8F7F1"/>
           </a:solidFill>
           <a:ln>
             <a:noFill/>
@@ -2429,7 +2427,7 @@
             <a:r>
               <a:rPr lang="ar-SA" sz="1050" b="1" dirty="0">
                 <a:solidFill>
-                  <a:srgbClr val="0E7C86"/>
+                  <a:srgbClr val="0E8A8A"/>
                 </a:solidFill>
                 <a:latin typeface="IBM Plex Sans Arabic"/>
                 <a:cs typeface="IBM Plex Sans Arabic"/>
@@ -2474,10 +2472,10 @@
               <a:buNone/>
               <a:defRPr lang="ar-SA" sz="1100" dirty="0">
                 <a:solidFill>
-                  <a:srgbClr val="1C2B3A"/>
+                  <a:srgbClr val="1F2A37"/>
                 </a:solidFill>
-                <a:latin typeface="IBM Plex Sans Arabic"/>
-                <a:cs typeface="IBM Plex Sans Arabic"/>
+                <a:latin typeface="IBM Plex Sans Arabic Medium"/>
+                <a:cs typeface="IBM Plex Sans Arabic Medium"/>
               </a:defRPr>
             </a:lvl1pPr>
           </a:lstStyle>
@@ -2585,12 +2583,12 @@
                 <a:spcPts val="0"/>
               </a:spcAft>
               <a:buNone/>
-              <a:defRPr lang="ar-SA" sz="1000" dirty="0">
+              <a:defRPr lang="ar-SA" sz="1050" dirty="0">
                 <a:solidFill>
                   <a:srgbClr val="5F6B7A"/>
                 </a:solidFill>
-                <a:latin typeface="IBM Plex Sans Arabic"/>
-                <a:cs typeface="IBM Plex Sans Arabic"/>
+                <a:latin typeface="IBM Plex Sans Arabic Medium"/>
+                <a:cs typeface="IBM Plex Sans Arabic Medium"/>
               </a:defRPr>
             </a:lvl1pPr>
           </a:lstStyle>
@@ -2618,7 +2616,7 @@
           </a:prstGeom>
           <a:ln w="6350" cap="rnd">
             <a:solidFill>
-              <a:srgbClr val="D9DEE5"/>
+              <a:srgbClr val="DDE1E8"/>
             </a:solidFill>
             <a:round/>
           </a:ln>
@@ -2657,7 +2655,7 @@
                 <a:spcPts val="0"/>
               </a:spcAft>
               <a:buNone/>
-              <a:defRPr lang="ar-SA" sz="900" dirty="0">
+              <a:defRPr lang="ar-SA" sz="950" dirty="0">
                 <a:solidFill>
                   <a:srgbClr val="5F6B7A"/>
                 </a:solidFill>
@@ -2701,9 +2699,9 @@
               <a:buNone/>
             </a:pPr>
             <a:r>
-              <a:rPr lang="ar-SA" sz="700" dirty="0">
+              <a:rPr lang="ar-SA" sz="800" dirty="0">
                 <a:solidFill>
-                  <a:srgbClr val="8A95A3"/>
+                  <a:srgbClr val="6C727E"/>
                 </a:solidFill>
                 <a:latin typeface="IBM Plex Sans Arabic"/>
                 <a:cs typeface="IBM Plex Sans Arabic"/>
@@ -3463,7 +3461,10 @@
           <a:lstStyle/>
           <a:p>
             <a:r>
-              <a:rPr lang="ar-SA" b="1" dirty="0"/>
+              <a:rPr lang="ar-SA" b="1" dirty="0">
+                <a:latin typeface="IBM Plex Sans Arabic"/>
+                <a:cs typeface="IBM Plex Sans Arabic"/>
+              </a:rPr>
               <a:t>إطلاق لوحة مؤشرات الأداء</a:t>
             </a:r>
             <a:r>
@@ -3473,7 +3474,10 @@
           </a:p>
           <a:p>
             <a:r>
-              <a:rPr lang="ar-SA" b="1" dirty="0"/>
+              <a:rPr lang="ar-SA" b="1" dirty="0">
+                <a:latin typeface="IBM Plex Sans Arabic"/>
+                <a:cs typeface="IBM Plex Sans Arabic"/>
+              </a:rPr>
               <a:t>تنقية بيانات المستفيدين</a:t>
             </a:r>
             <a:r>
@@ -3483,7 +3487,10 @@
           </a:p>
           <a:p>
             <a:r>
-              <a:rPr lang="ar-SA" b="1" dirty="0"/>
+              <a:rPr lang="ar-SA" b="1" dirty="0">
+                <a:latin typeface="IBM Plex Sans Arabic"/>
+                <a:cs typeface="IBM Plex Sans Arabic"/>
+              </a:rPr>
               <a:t>ورشة سياسة حوكمة البيانات</a:t>
             </a:r>
             <a:r>
@@ -3493,7 +3500,10 @@
           </a:p>
           <a:p>
             <a:r>
-              <a:rPr lang="ar-SA" b="1" dirty="0"/>
+              <a:rPr lang="ar-SA" b="1" dirty="0">
+                <a:latin typeface="IBM Plex Sans Arabic"/>
+                <a:cs typeface="IBM Plex Sans Arabic"/>
+              </a:rPr>
               <a:t>تقرير الامتثال الشهري</a:t>
             </a:r>
             <a:r>
@@ -3632,8 +3642,8 @@
           <p:nvPr/>
         </p:nvGraphicFramePr>
         <p:xfrm>
-          <a:off x="432000" y="5544000"/>
-          <a:ext cx="6696000" cy="1422000"/>
+          <a:off x="432000" y="5472000"/>
+          <a:ext cx="6696000" cy="1494000"/>
         </p:xfrm>
         <a:graphic>
           <a:graphicData uri="http://schemas.openxmlformats.org/drawingml/2006/table">
@@ -3660,7 +3670,7 @@
                       <a:r>
                         <a:rPr lang="ar-SA" sz="950" b="1" dirty="0">
                           <a:solidFill>
-                            <a:srgbClr val="0B1F3F"/>
+                            <a:srgbClr val="273470"/>
                           </a:solidFill>
                           <a:latin typeface="IBM Plex Sans Arabic"/>
                           <a:cs typeface="IBM Plex Sans Arabic"/>
@@ -3681,12 +3691,12 @@
                     </a:lnT>
                     <a:lnB w="6350" cap="flat" cmpd="sng" algn="ctr">
                       <a:solidFill>
-                        <a:srgbClr val="12A5A8"/>
+                        <a:srgbClr val="33CC99"/>
                       </a:solidFill>
                       <a:prstDash val="solid"/>
                     </a:lnB>
                     <a:solidFill>
-                      <a:srgbClr val="EEF2F8"/>
+                      <a:srgbClr val="EEF0F8"/>
                     </a:solidFill>
                   </a:tcPr>
                 </a:tc>
@@ -3704,7 +3714,7 @@
                       <a:r>
                         <a:rPr lang="ar-SA" sz="950" b="1" dirty="0">
                           <a:solidFill>
-                            <a:srgbClr val="0B1F3F"/>
+                            <a:srgbClr val="273470"/>
                           </a:solidFill>
                           <a:latin typeface="IBM Plex Sans Arabic"/>
                           <a:cs typeface="IBM Plex Sans Arabic"/>
@@ -3725,12 +3735,12 @@
                     </a:lnT>
                     <a:lnB w="6350" cap="flat" cmpd="sng" algn="ctr">
                       <a:solidFill>
-                        <a:srgbClr val="12A5A8"/>
+                        <a:srgbClr val="33CC99"/>
                       </a:solidFill>
                       <a:prstDash val="solid"/>
                     </a:lnB>
                     <a:solidFill>
-                      <a:srgbClr val="EEF2F8"/>
+                      <a:srgbClr val="EEF0F8"/>
                     </a:solidFill>
                   </a:tcPr>
                 </a:tc>
@@ -3748,7 +3758,7 @@
                       <a:r>
                         <a:rPr lang="ar-SA" sz="950" b="1" dirty="0">
                           <a:solidFill>
-                            <a:srgbClr val="0B1F3F"/>
+                            <a:srgbClr val="273470"/>
                           </a:solidFill>
                           <a:latin typeface="IBM Plex Sans Arabic"/>
                           <a:cs typeface="IBM Plex Sans Arabic"/>
@@ -3769,12 +3779,12 @@
                     </a:lnT>
                     <a:lnB w="6350" cap="flat" cmpd="sng" algn="ctr">
                       <a:solidFill>
-                        <a:srgbClr val="12A5A8"/>
+                        <a:srgbClr val="33CC99"/>
                       </a:solidFill>
                       <a:prstDash val="solid"/>
                     </a:lnB>
                     <a:solidFill>
-                      <a:srgbClr val="EEF2F8"/>
+                      <a:srgbClr val="EEF0F8"/>
                     </a:solidFill>
                   </a:tcPr>
                 </a:tc>
@@ -3792,7 +3802,7 @@
                       <a:r>
                         <a:rPr lang="ar-SA" sz="950" b="1" dirty="0">
                           <a:solidFill>
-                            <a:srgbClr val="0B1F3F"/>
+                            <a:srgbClr val="273470"/>
                           </a:solidFill>
                           <a:latin typeface="IBM Plex Sans Arabic"/>
                           <a:cs typeface="IBM Plex Sans Arabic"/>
@@ -3813,17 +3823,17 @@
                     </a:lnT>
                     <a:lnB w="6350" cap="flat" cmpd="sng" algn="ctr">
                       <a:solidFill>
-                        <a:srgbClr val="12A5A8"/>
+                        <a:srgbClr val="33CC99"/>
                       </a:solidFill>
                       <a:prstDash val="solid"/>
                     </a:lnB>
                     <a:solidFill>
-                      <a:srgbClr val="EEF2F8"/>
+                      <a:srgbClr val="EEF0F8"/>
                     </a:solidFill>
                   </a:tcPr>
                 </a:tc>
               </a:tr>
-              <a:tr h="288000">
+              <a:tr h="306000">
                 <a:tc>
                   <a:txBody>
                     <a:bodyPr/>
@@ -3840,8 +3850,8 @@
                           <a:solidFill>
                             <a:srgbClr val="5F6B7A"/>
                           </a:solidFill>
-                          <a:latin typeface="IBM Plex Sans Arabic"/>
-                          <a:cs typeface="IBM Plex Sans Arabic"/>
+                          <a:latin typeface="IBM Plex Sans Arabic Medium"/>
+                          <a:cs typeface="IBM Plex Sans Arabic Medium"/>
                         </a:rPr>
                         <a:t>على المسار</a:t>
                       </a:r>
@@ -3859,7 +3869,7 @@
                     </a:lnT>
                     <a:lnB w="6350" cap="flat" cmpd="sng" algn="ctr">
                       <a:solidFill>
-                        <a:srgbClr val="D9DEE5"/>
+                        <a:srgbClr val="DDE1E8"/>
                       </a:solidFill>
                       <a:prstDash val="solid"/>
                     </a:lnB>
@@ -3882,8 +3892,8 @@
                           <a:solidFill>
                             <a:srgbClr val="5F6B7A"/>
                           </a:solidFill>
-                          <a:latin typeface="IBM Plex Sans Arabic"/>
-                          <a:cs typeface="IBM Plex Sans Arabic"/>
+                          <a:latin typeface="IBM Plex Sans Arabic Medium"/>
+                          <a:cs typeface="IBM Plex Sans Arabic Medium"/>
                         </a:rPr>
                         <a:t>5 نوفمبر</a:t>
                       </a:r>
@@ -3901,7 +3911,7 @@
                     </a:lnT>
                     <a:lnB w="6350" cap="flat" cmpd="sng" algn="ctr">
                       <a:solidFill>
-                        <a:srgbClr val="D9DEE5"/>
+                        <a:srgbClr val="DDE1E8"/>
                       </a:solidFill>
                       <a:prstDash val="solid"/>
                     </a:lnB>
@@ -3924,8 +3934,8 @@
                           <a:solidFill>
                             <a:srgbClr val="5F6B7A"/>
                           </a:solidFill>
-                          <a:latin typeface="IBM Plex Sans Arabic"/>
-                          <a:cs typeface="IBM Plex Sans Arabic"/>
+                          <a:latin typeface="IBM Plex Sans Arabic Medium"/>
+                          <a:cs typeface="IBM Plex Sans Arabic Medium"/>
                         </a:rPr>
                         <a:t>70٪</a:t>
                       </a:r>
@@ -3943,7 +3953,7 @@
                     </a:lnT>
                     <a:lnB w="6350" cap="flat" cmpd="sng" algn="ctr">
                       <a:solidFill>
-                        <a:srgbClr val="D9DEE5"/>
+                        <a:srgbClr val="DDE1E8"/>
                       </a:solidFill>
                       <a:prstDash val="solid"/>
                     </a:lnB>
@@ -3964,10 +3974,10 @@
                       <a:r>
                         <a:rPr lang="ar-SA" sz="1100" dirty="0">
                           <a:solidFill>
-                            <a:srgbClr val="1C2B3A"/>
+                            <a:srgbClr val="1F2A37"/>
                           </a:solidFill>
-                          <a:latin typeface="IBM Plex Sans Arabic"/>
-                          <a:cs typeface="IBM Plex Sans Arabic"/>
+                          <a:latin typeface="IBM Plex Sans Arabic Medium"/>
+                          <a:cs typeface="IBM Plex Sans Arabic Medium"/>
                         </a:rPr>
                         <a:t>أتمتة تقارير الالتزام الأسبوعية</a:t>
                       </a:r>
@@ -3985,7 +3995,7 @@
                     </a:lnT>
                     <a:lnB w="6350" cap="flat" cmpd="sng" algn="ctr">
                       <a:solidFill>
-                        <a:srgbClr val="D9DEE5"/>
+                        <a:srgbClr val="DDE1E8"/>
                       </a:solidFill>
                       <a:prstDash val="solid"/>
                     </a:lnB>
@@ -3993,7 +4003,7 @@
                   </a:tcPr>
                 </a:tc>
               </a:tr>
-              <a:tr h="288000">
+              <a:tr h="306000">
                 <a:tc>
                   <a:txBody>
                     <a:bodyPr/>
@@ -4010,8 +4020,8 @@
                           <a:solidFill>
                             <a:srgbClr val="5F6B7A"/>
                           </a:solidFill>
-                          <a:latin typeface="IBM Plex Sans Arabic"/>
-                          <a:cs typeface="IBM Plex Sans Arabic"/>
+                          <a:latin typeface="IBM Plex Sans Arabic Medium"/>
+                          <a:cs typeface="IBM Plex Sans Arabic Medium"/>
                         </a:rPr>
                         <a:t>تأخر بسيط</a:t>
                       </a:r>
@@ -4029,7 +4039,7 @@
                     </a:lnT>
                     <a:lnB w="6350" cap="flat" cmpd="sng" algn="ctr">
                       <a:solidFill>
-                        <a:srgbClr val="D9DEE5"/>
+                        <a:srgbClr val="DDE1E8"/>
                       </a:solidFill>
                       <a:prstDash val="solid"/>
                     </a:lnB>
@@ -4052,8 +4062,8 @@
                           <a:solidFill>
                             <a:srgbClr val="5F6B7A"/>
                           </a:solidFill>
-                          <a:latin typeface="IBM Plex Sans Arabic"/>
-                          <a:cs typeface="IBM Plex Sans Arabic"/>
+                          <a:latin typeface="IBM Plex Sans Arabic Medium"/>
+                          <a:cs typeface="IBM Plex Sans Arabic Medium"/>
                         </a:rPr>
                         <a:t>12 نوفمبر</a:t>
                       </a:r>
@@ -4071,7 +4081,7 @@
                     </a:lnT>
                     <a:lnB w="6350" cap="flat" cmpd="sng" algn="ctr">
                       <a:solidFill>
-                        <a:srgbClr val="D9DEE5"/>
+                        <a:srgbClr val="DDE1E8"/>
                       </a:solidFill>
                       <a:prstDash val="solid"/>
                     </a:lnB>
@@ -4094,8 +4104,8 @@
                           <a:solidFill>
                             <a:srgbClr val="5F6B7A"/>
                           </a:solidFill>
-                          <a:latin typeface="IBM Plex Sans Arabic"/>
-                          <a:cs typeface="IBM Plex Sans Arabic"/>
+                          <a:latin typeface="IBM Plex Sans Arabic Medium"/>
+                          <a:cs typeface="IBM Plex Sans Arabic Medium"/>
                         </a:rPr>
                         <a:t>45٪</a:t>
                       </a:r>
@@ -4113,7 +4123,7 @@
                     </a:lnT>
                     <a:lnB w="6350" cap="flat" cmpd="sng" algn="ctr">
                       <a:solidFill>
-                        <a:srgbClr val="D9DEE5"/>
+                        <a:srgbClr val="DDE1E8"/>
                       </a:solidFill>
                       <a:prstDash val="solid"/>
                     </a:lnB>
@@ -4134,10 +4144,10 @@
                       <a:r>
                         <a:rPr lang="ar-SA" sz="1100" dirty="0">
                           <a:solidFill>
-                            <a:srgbClr val="1C2B3A"/>
+                            <a:srgbClr val="1F2A37"/>
                           </a:solidFill>
-                          <a:latin typeface="IBM Plex Sans Arabic"/>
-                          <a:cs typeface="IBM Plex Sans Arabic"/>
+                          <a:latin typeface="IBM Plex Sans Arabic Medium"/>
+                          <a:cs typeface="IBM Plex Sans Arabic Medium"/>
                         </a:rPr>
                         <a:t>تكامل بيانات الموارد البشرية مع مستودع البيانات</a:t>
                       </a:r>
@@ -4155,7 +4165,7 @@
                     </a:lnT>
                     <a:lnB w="6350" cap="flat" cmpd="sng" algn="ctr">
                       <a:solidFill>
-                        <a:srgbClr val="D9DEE5"/>
+                        <a:srgbClr val="DDE1E8"/>
                       </a:solidFill>
                       <a:prstDash val="solid"/>
                     </a:lnB>
@@ -4163,7 +4173,7 @@
                   </a:tcPr>
                 </a:tc>
               </a:tr>
-              <a:tr h="288000">
+              <a:tr h="306000">
                 <a:tc>
                   <a:txBody>
                     <a:bodyPr/>
@@ -4180,8 +4190,8 @@
                           <a:solidFill>
                             <a:srgbClr val="5F6B7A"/>
                           </a:solidFill>
-                          <a:latin typeface="IBM Plex Sans Arabic"/>
-                          <a:cs typeface="IBM Plex Sans Arabic"/>
+                          <a:latin typeface="IBM Plex Sans Arabic Medium"/>
+                          <a:cs typeface="IBM Plex Sans Arabic Medium"/>
                         </a:rPr>
                         <a:t>على المسار</a:t>
                       </a:r>
@@ -4199,7 +4209,7 @@
                     </a:lnT>
                     <a:lnB w="6350" cap="flat" cmpd="sng" algn="ctr">
                       <a:solidFill>
-                        <a:srgbClr val="D9DEE5"/>
+                        <a:srgbClr val="DDE1E8"/>
                       </a:solidFill>
                       <a:prstDash val="solid"/>
                     </a:lnB>
@@ -4222,8 +4232,8 @@
                           <a:solidFill>
                             <a:srgbClr val="5F6B7A"/>
                           </a:solidFill>
-                          <a:latin typeface="IBM Plex Sans Arabic"/>
-                          <a:cs typeface="IBM Plex Sans Arabic"/>
+                          <a:latin typeface="IBM Plex Sans Arabic Medium"/>
+                          <a:cs typeface="IBM Plex Sans Arabic Medium"/>
                         </a:rPr>
                         <a:t>20 نوفمبر</a:t>
                       </a:r>
@@ -4241,7 +4251,7 @@
                     </a:lnT>
                     <a:lnB w="6350" cap="flat" cmpd="sng" algn="ctr">
                       <a:solidFill>
-                        <a:srgbClr val="D9DEE5"/>
+                        <a:srgbClr val="DDE1E8"/>
                       </a:solidFill>
                       <a:prstDash val="solid"/>
                     </a:lnB>
@@ -4264,8 +4274,8 @@
                           <a:solidFill>
                             <a:srgbClr val="5F6B7A"/>
                           </a:solidFill>
-                          <a:latin typeface="IBM Plex Sans Arabic"/>
-                          <a:cs typeface="IBM Plex Sans Arabic"/>
+                          <a:latin typeface="IBM Plex Sans Arabic Medium"/>
+                          <a:cs typeface="IBM Plex Sans Arabic Medium"/>
                         </a:rPr>
                         <a:t>30٪</a:t>
                       </a:r>
@@ -4283,7 +4293,7 @@
                     </a:lnT>
                     <a:lnB w="6350" cap="flat" cmpd="sng" algn="ctr">
                       <a:solidFill>
-                        <a:srgbClr val="D9DEE5"/>
+                        <a:srgbClr val="DDE1E8"/>
                       </a:solidFill>
                       <a:prstDash val="solid"/>
                     </a:lnB>
@@ -4304,10 +4314,10 @@
                       <a:r>
                         <a:rPr lang="ar-SA" sz="1100" dirty="0">
                           <a:solidFill>
-                            <a:srgbClr val="1C2B3A"/>
+                            <a:srgbClr val="1F2A37"/>
                           </a:solidFill>
-                          <a:latin typeface="IBM Plex Sans Arabic"/>
-                          <a:cs typeface="IBM Plex Sans Arabic"/>
+                          <a:latin typeface="IBM Plex Sans Arabic Medium"/>
+                          <a:cs typeface="IBM Plex Sans Arabic Medium"/>
                         </a:rPr>
                         <a:t>تحديث دليل تصنيف البيانات</a:t>
                       </a:r>
@@ -4325,7 +4335,7 @@
                     </a:lnT>
                     <a:lnB w="6350" cap="flat" cmpd="sng" algn="ctr">
                       <a:solidFill>
-                        <a:srgbClr val="D9DEE5"/>
+                        <a:srgbClr val="DDE1E8"/>
                       </a:solidFill>
                       <a:prstDash val="solid"/>
                     </a:lnB>
@@ -4333,7 +4343,7 @@
                   </a:tcPr>
                 </a:tc>
               </a:tr>
-              <a:tr h="288000">
+              <a:tr h="306000">
                 <a:tc>
                   <a:txBody>
                     <a:bodyPr/>
@@ -4349,8 +4359,8 @@
                         <a:solidFill>
                           <a:srgbClr val="5F6B7A"/>
                         </a:solidFill>
-                        <a:latin typeface="IBM Plex Sans Arabic"/>
-                        <a:cs typeface="IBM Plex Sans Arabic"/>
+                        <a:latin typeface="IBM Plex Sans Arabic Medium"/>
+                        <a:cs typeface="IBM Plex Sans Arabic Medium"/>
                       </a:endParaRPr>
                     </a:p>
                   </a:txBody>
@@ -4366,7 +4376,7 @@
                     </a:lnT>
                     <a:lnB w="6350" cap="flat" cmpd="sng" algn="ctr">
                       <a:solidFill>
-                        <a:srgbClr val="D9DEE5"/>
+                        <a:srgbClr val="DDE1E8"/>
                       </a:solidFill>
                       <a:prstDash val="solid"/>
                     </a:lnB>
@@ -4388,8 +4398,8 @@
                         <a:solidFill>
                           <a:srgbClr val="5F6B7A"/>
                         </a:solidFill>
-                        <a:latin typeface="IBM Plex Sans Arabic"/>
-                        <a:cs typeface="IBM Plex Sans Arabic"/>
+                        <a:latin typeface="IBM Plex Sans Arabic Medium"/>
+                        <a:cs typeface="IBM Plex Sans Arabic Medium"/>
                       </a:endParaRPr>
                     </a:p>
                   </a:txBody>
@@ -4405,7 +4415,7 @@
                     </a:lnT>
                     <a:lnB w="6350" cap="flat" cmpd="sng" algn="ctr">
                       <a:solidFill>
-                        <a:srgbClr val="D9DEE5"/>
+                        <a:srgbClr val="DDE1E8"/>
                       </a:solidFill>
                       <a:prstDash val="solid"/>
                     </a:lnB>
@@ -4427,8 +4437,8 @@
                         <a:solidFill>
                           <a:srgbClr val="5F6B7A"/>
                         </a:solidFill>
-                        <a:latin typeface="IBM Plex Sans Arabic"/>
-                        <a:cs typeface="IBM Plex Sans Arabic"/>
+                        <a:latin typeface="IBM Plex Sans Arabic Medium"/>
+                        <a:cs typeface="IBM Plex Sans Arabic Medium"/>
                       </a:endParaRPr>
                     </a:p>
                   </a:txBody>
@@ -4444,7 +4454,7 @@
                     </a:lnT>
                     <a:lnB w="6350" cap="flat" cmpd="sng" algn="ctr">
                       <a:solidFill>
-                        <a:srgbClr val="D9DEE5"/>
+                        <a:srgbClr val="DDE1E8"/>
                       </a:solidFill>
                       <a:prstDash val="solid"/>
                     </a:lnB>
@@ -4464,10 +4474,10 @@
                       </a:pPr>
                       <a:endParaRPr lang="ar-SA" sz="1100" dirty="0">
                         <a:solidFill>
-                          <a:srgbClr val="1C2B3A"/>
+                          <a:srgbClr val="1F2A37"/>
                         </a:solidFill>
-                        <a:latin typeface="IBM Plex Sans Arabic"/>
-                        <a:cs typeface="IBM Plex Sans Arabic"/>
+                        <a:latin typeface="IBM Plex Sans Arabic Medium"/>
+                        <a:cs typeface="IBM Plex Sans Arabic Medium"/>
                       </a:endParaRPr>
                     </a:p>
                   </a:txBody>
@@ -4483,7 +4493,7 @@
                     </a:lnT>
                     <a:lnB w="6350" cap="flat" cmpd="sng" algn="ctr">
                       <a:solidFill>
-                        <a:srgbClr val="D9DEE5"/>
+                        <a:srgbClr val="DDE1E8"/>
                       </a:solidFill>
                       <a:prstDash val="solid"/>
                     </a:lnB>
@@ -4528,7 +4538,7 @@
             <a:avLst/>
           </a:prstGeom>
           <a:solidFill>
-            <a:srgbClr val="0B1F3F"/>
+            <a:srgbClr val="273470"/>
           </a:solidFill>
           <a:ln>
             <a:noFill/>
@@ -4603,7 +4613,7 @@
             <a:r>
               <a:rPr lang="ar-SA" sz="1050" dirty="0">
                 <a:solidFill>
-                  <a:srgbClr val="6CC04A"/>
+                  <a:srgbClr val="33CC99"/>
                 </a:solidFill>
                 <a:latin typeface="IBM Plex Sans Arabic"/>
                 <a:cs typeface="IBM Plex Sans Arabic"/>
@@ -4642,7 +4652,7 @@
             <a:r>
               <a:rPr lang="ar-SA" sz="1400" b="1" dirty="0">
                 <a:solidFill>
-                  <a:srgbClr val="0B1F3F"/>
+                  <a:srgbClr val="273470"/>
                 </a:solidFill>
                 <a:latin typeface="IBM Plex Sans Arabic"/>
                 <a:cs typeface="IBM Plex Sans Arabic"/>
@@ -4667,7 +4677,7 @@
             <a:avLst/>
           </a:prstGeom>
           <a:solidFill>
-            <a:srgbClr val="12A5A8"/>
+            <a:srgbClr val="0E8A8A"/>
           </a:solidFill>
           <a:ln>
             <a:noFill/>
@@ -4722,7 +4732,7 @@
             <a:r>
               <a:rPr lang="ar-SA" sz="1200" b="1" dirty="0">
                 <a:solidFill>
-                  <a:srgbClr val="0E7C86"/>
+                  <a:srgbClr val="0E8A8A"/>
                 </a:solidFill>
                 <a:latin typeface="IBM Plex Sans Arabic"/>
                 <a:cs typeface="IBM Plex Sans Arabic"/>
@@ -4764,7 +4774,7 @@
             <a:r>
               <a:rPr lang="ar-SA" sz="1050" dirty="0">
                 <a:solidFill>
-                  <a:srgbClr val="1C2B3A"/>
+                  <a:srgbClr val="1F2A37"/>
                 </a:solidFill>
                 <a:latin typeface="IBM Plex Sans Arabic"/>
                 <a:cs typeface="IBM Plex Sans Arabic"/>
@@ -4789,7 +4799,7 @@
             <a:avLst/>
           </a:prstGeom>
           <a:solidFill>
-            <a:srgbClr val="12A5A8"/>
+            <a:srgbClr val="0E8A8A"/>
           </a:solidFill>
           <a:ln>
             <a:noFill/>
@@ -4844,7 +4854,7 @@
             <a:r>
               <a:rPr lang="ar-SA" sz="1200" b="1" dirty="0">
                 <a:solidFill>
-                  <a:srgbClr val="0E7C86"/>
+                  <a:srgbClr val="0E8A8A"/>
                 </a:solidFill>
                 <a:latin typeface="IBM Plex Sans Arabic"/>
                 <a:cs typeface="IBM Plex Sans Arabic"/>
@@ -4886,7 +4896,7 @@
             <a:r>
               <a:rPr lang="ar-SA" sz="1050" dirty="0">
                 <a:solidFill>
-                  <a:srgbClr val="1C2B3A"/>
+                  <a:srgbClr val="1F2A37"/>
                 </a:solidFill>
                 <a:latin typeface="IBM Plex Sans Arabic"/>
                 <a:cs typeface="IBM Plex Sans Arabic"/>
@@ -4911,7 +4921,7 @@
             <a:avLst/>
           </a:prstGeom>
           <a:solidFill>
-            <a:srgbClr val="12A5A8"/>
+            <a:srgbClr val="0E8A8A"/>
           </a:solidFill>
           <a:ln>
             <a:noFill/>
@@ -4966,7 +4976,7 @@
             <a:r>
               <a:rPr lang="ar-SA" sz="1200" b="1" dirty="0">
                 <a:solidFill>
-                  <a:srgbClr val="0E7C86"/>
+                  <a:srgbClr val="0E8A8A"/>
                 </a:solidFill>
                 <a:latin typeface="IBM Plex Sans Arabic"/>
                 <a:cs typeface="IBM Plex Sans Arabic"/>
@@ -5008,7 +5018,7 @@
             <a:r>
               <a:rPr lang="ar-SA" sz="1050" dirty="0">
                 <a:solidFill>
-                  <a:srgbClr val="1C2B3A"/>
+                  <a:srgbClr val="1F2A37"/>
                 </a:solidFill>
                 <a:latin typeface="IBM Plex Sans Arabic"/>
                 <a:cs typeface="IBM Plex Sans Arabic"/>
@@ -5033,7 +5043,7 @@
             <a:avLst/>
           </a:prstGeom>
           <a:solidFill>
-            <a:srgbClr val="12A5A8"/>
+            <a:srgbClr val="0E8A8A"/>
           </a:solidFill>
           <a:ln>
             <a:noFill/>
@@ -5088,7 +5098,7 @@
             <a:r>
               <a:rPr lang="ar-SA" sz="1200" b="1" dirty="0">
                 <a:solidFill>
-                  <a:srgbClr val="0E7C86"/>
+                  <a:srgbClr val="0E8A8A"/>
                 </a:solidFill>
                 <a:latin typeface="IBM Plex Sans Arabic"/>
                 <a:cs typeface="IBM Plex Sans Arabic"/>
@@ -5130,7 +5140,7 @@
             <a:r>
               <a:rPr lang="ar-SA" sz="1050" dirty="0">
                 <a:solidFill>
-                  <a:srgbClr val="1C2B3A"/>
+                  <a:srgbClr val="1F2A37"/>
                 </a:solidFill>
                 <a:latin typeface="IBM Plex Sans Arabic"/>
                 <a:cs typeface="IBM Plex Sans Arabic"/>
@@ -5155,7 +5165,7 @@
             <a:avLst/>
           </a:prstGeom>
           <a:solidFill>
-            <a:srgbClr val="12A5A8"/>
+            <a:srgbClr val="0E8A8A"/>
           </a:solidFill>
           <a:ln>
             <a:noFill/>
@@ -5210,7 +5220,7 @@
             <a:r>
               <a:rPr lang="ar-SA" sz="1200" b="1" dirty="0">
                 <a:solidFill>
-                  <a:srgbClr val="0E7C86"/>
+                  <a:srgbClr val="0E8A8A"/>
                 </a:solidFill>
                 <a:latin typeface="IBM Plex Sans Arabic"/>
                 <a:cs typeface="IBM Plex Sans Arabic"/>
@@ -5252,7 +5262,7 @@
             <a:r>
               <a:rPr lang="ar-SA" sz="1050" dirty="0">
                 <a:solidFill>
-                  <a:srgbClr val="1C2B3A"/>
+                  <a:srgbClr val="1F2A37"/>
                 </a:solidFill>
                 <a:latin typeface="IBM Plex Sans Arabic"/>
                 <a:cs typeface="IBM Plex Sans Arabic"/>
@@ -5277,7 +5287,7 @@
             <a:avLst/>
           </a:prstGeom>
           <a:solidFill>
-            <a:srgbClr val="12A5A8"/>
+            <a:srgbClr val="0E8A8A"/>
           </a:solidFill>
           <a:ln>
             <a:noFill/>
@@ -5332,7 +5342,7 @@
             <a:r>
               <a:rPr lang="ar-SA" sz="1200" b="1" dirty="0">
                 <a:solidFill>
-                  <a:srgbClr val="0E7C86"/>
+                  <a:srgbClr val="0E8A8A"/>
                 </a:solidFill>
                 <a:latin typeface="IBM Plex Sans Arabic"/>
                 <a:cs typeface="IBM Plex Sans Arabic"/>
@@ -5374,7 +5384,7 @@
             <a:r>
               <a:rPr lang="ar-SA" sz="1050" dirty="0">
                 <a:solidFill>
-                  <a:srgbClr val="1C2B3A"/>
+                  <a:srgbClr val="1F2A37"/>
                 </a:solidFill>
                 <a:latin typeface="IBM Plex Sans Arabic"/>
                 <a:cs typeface="IBM Plex Sans Arabic"/>
@@ -5399,7 +5409,7 @@
             <a:avLst/>
           </a:prstGeom>
           <a:solidFill>
-            <a:srgbClr val="12A5A8"/>
+            <a:srgbClr val="0E8A8A"/>
           </a:solidFill>
           <a:ln>
             <a:noFill/>
@@ -5454,7 +5464,7 @@
             <a:r>
               <a:rPr lang="ar-SA" sz="1200" b="1" dirty="0">
                 <a:solidFill>
-                  <a:srgbClr val="0E7C86"/>
+                  <a:srgbClr val="0E8A8A"/>
                 </a:solidFill>
                 <a:latin typeface="IBM Plex Sans Arabic"/>
                 <a:cs typeface="IBM Plex Sans Arabic"/>
@@ -5496,7 +5506,7 @@
             <a:r>
               <a:rPr lang="ar-SA" sz="1050" dirty="0">
                 <a:solidFill>
-                  <a:srgbClr val="1C2B3A"/>
+                  <a:srgbClr val="1F2A37"/>
                 </a:solidFill>
                 <a:latin typeface="IBM Plex Sans Arabic"/>
                 <a:cs typeface="IBM Plex Sans Arabic"/>
@@ -5521,7 +5531,7 @@
             <a:avLst/>
           </a:prstGeom>
           <a:solidFill>
-            <a:srgbClr val="12A5A8"/>
+            <a:srgbClr val="0E8A8A"/>
           </a:solidFill>
           <a:ln>
             <a:noFill/>
@@ -5576,7 +5586,7 @@
             <a:r>
               <a:rPr lang="ar-SA" sz="1200" b="1" dirty="0">
                 <a:solidFill>
-                  <a:srgbClr val="0E7C86"/>
+                  <a:srgbClr val="0E8A8A"/>
                 </a:solidFill>
                 <a:latin typeface="IBM Plex Sans Arabic"/>
                 <a:cs typeface="IBM Plex Sans Arabic"/>
@@ -5618,7 +5628,7 @@
             <a:r>
               <a:rPr lang="ar-SA" sz="1050" dirty="0">
                 <a:solidFill>
-                  <a:srgbClr val="1C2B3A"/>
+                  <a:srgbClr val="1F2A37"/>
                 </a:solidFill>
                 <a:latin typeface="IBM Plex Sans Arabic"/>
                 <a:cs typeface="IBM Plex Sans Arabic"/>
@@ -5657,7 +5667,7 @@
             <a:r>
               <a:rPr lang="ar-SA" sz="800" dirty="0">
                 <a:solidFill>
-                  <a:srgbClr val="8A95A3"/>
+                  <a:srgbClr val="6C727E"/>
                 </a:solidFill>
                 <a:latin typeface="IBM Plex Sans Arabic"/>
                 <a:cs typeface="IBM Plex Sans Arabic"/>
@@ -5680,40 +5690,40 @@
   <a:themeElements>
     <a:clrScheme name="SDAIA-inspired">
       <a:dk1>
-        <a:srgbClr val="1C2B3A"/>
+        <a:srgbClr val="1F2A37"/>
       </a:dk1>
       <a:lt1>
         <a:srgbClr val="FFFFFF"/>
       </a:lt1>
       <a:dk2>
-        <a:srgbClr val="0B1F3F"/>
+        <a:srgbClr val="273470"/>
       </a:dk2>
       <a:lt2>
-        <a:srgbClr val="EEF2F8"/>
+        <a:srgbClr val="EEF0F8"/>
       </a:lt2>
       <a:accent1>
-        <a:srgbClr val="12A5A8"/>
+        <a:srgbClr val="33CC99"/>
       </a:accent1>
       <a:accent2>
-        <a:srgbClr val="6CC04A"/>
+        <a:srgbClr val="6459A7"/>
       </a:accent2>
       <a:accent3>
-        <a:srgbClr val="14315E"/>
+        <a:srgbClr val="0E8A8A"/>
       </a:accent3>
       <a:accent4>
-        <a:srgbClr val="D98B1F"/>
+        <a:srgbClr val="99D633"/>
       </a:accent4>
       <a:accent5>
-        <a:srgbClr val="0E7C86"/>
+        <a:srgbClr val="66CCFF"/>
       </a:accent5>
       <a:accent6>
-        <a:srgbClr val="5F6B7A"/>
+        <a:srgbClr val="DC6803"/>
       </a:accent6>
       <a:hlink>
-        <a:srgbClr val="0E7C86"/>
+        <a:srgbClr val="0E8A8A"/>
       </a:hlink>
       <a:folHlink>
-        <a:srgbClr val="5F6B7A"/>
+        <a:srgbClr val="6459A7"/>
       </a:folHlink>
     </a:clrScheme>
     <a:fontScheme name="Office">
